--- a/data-eng/decks/w5d1s2.pptx
+++ b/data-eng/decks/w5d1s2.pptx
@@ -3100,7 +3100,7 @@
       <p:grpSpPr/>
       <p:sp>
         <p:nvSpPr>
-          <p:cNvPr id="2" name="Oval 1"/>
+          <p:cNvPr id="2" name="deckgen:decor"/>
           <p:cNvSpPr/>
           <p:nvPr/>
         </p:nvSpPr>
@@ -3130,7 +3130,7 @@
       </p:sp>
       <p:sp>
         <p:nvSpPr>
-          <p:cNvPr id="3" name="Oval 2"/>
+          <p:cNvPr id="3" name="deckgen:decor"/>
           <p:cNvSpPr/>
           <p:nvPr/>
         </p:nvSpPr>
@@ -3160,7 +3160,7 @@
       </p:sp>
       <p:sp>
         <p:nvSpPr>
-          <p:cNvPr id="4" name="Oval 3"/>
+          <p:cNvPr id="4" name="deckgen:decor"/>
           <p:cNvSpPr/>
           <p:nvPr/>
         </p:nvSpPr>
@@ -3190,7 +3190,7 @@
       </p:sp>
       <p:sp>
         <p:nvSpPr>
-          <p:cNvPr id="5" name="Rectangle 4"/>
+          <p:cNvPr id="5" name="deckgen:decor"/>
           <p:cNvSpPr/>
           <p:nvPr/>
         </p:nvSpPr>
@@ -3220,7 +3220,7 @@
       </p:sp>
       <p:sp>
         <p:nvSpPr>
-          <p:cNvPr id="6" name="Oval 5"/>
+          <p:cNvPr id="6" name="deckgen:decor"/>
           <p:cNvSpPr/>
           <p:nvPr/>
         </p:nvSpPr>
@@ -3250,7 +3250,7 @@
       </p:sp>
       <p:sp>
         <p:nvSpPr>
-          <p:cNvPr id="7" name="Oval 6"/>
+          <p:cNvPr id="7" name="deckgen:decor"/>
           <p:cNvSpPr/>
           <p:nvPr/>
         </p:nvSpPr>
@@ -3280,7 +3280,7 @@
       </p:sp>
       <p:sp>
         <p:nvSpPr>
-          <p:cNvPr id="8" name="Oval 7"/>
+          <p:cNvPr id="8" name="deckgen:decor"/>
           <p:cNvSpPr/>
           <p:nvPr/>
         </p:nvSpPr>
@@ -3310,7 +3310,7 @@
       </p:sp>
       <p:sp>
         <p:nvSpPr>
-          <p:cNvPr id="9" name="Oval 8"/>
+          <p:cNvPr id="9" name="deckgen:decor"/>
           <p:cNvSpPr/>
           <p:nvPr/>
         </p:nvSpPr>
@@ -3340,7 +3340,7 @@
       </p:sp>
       <p:sp>
         <p:nvSpPr>
-          <p:cNvPr id="10" name="Rectangle 9"/>
+          <p:cNvPr id="10" name="deckgen:decor"/>
           <p:cNvSpPr/>
           <p:nvPr/>
         </p:nvSpPr>
@@ -3618,7 +3618,7 @@
       <p:grpSpPr/>
       <p:sp>
         <p:nvSpPr>
-          <p:cNvPr id="2" name="Oval 1"/>
+          <p:cNvPr id="2" name="deckgen:decor"/>
           <p:cNvSpPr/>
           <p:nvPr/>
         </p:nvSpPr>
@@ -3648,7 +3648,7 @@
       </p:sp>
       <p:sp>
         <p:nvSpPr>
-          <p:cNvPr id="3" name="Oval 2"/>
+          <p:cNvPr id="3" name="deckgen:decor"/>
           <p:cNvSpPr/>
           <p:nvPr/>
         </p:nvSpPr>
@@ -3678,7 +3678,7 @@
       </p:sp>
       <p:sp>
         <p:nvSpPr>
-          <p:cNvPr id="4" name="Oval 3"/>
+          <p:cNvPr id="4" name="deckgen:decor"/>
           <p:cNvSpPr/>
           <p:nvPr/>
         </p:nvSpPr>
@@ -4105,7 +4105,7 @@
                 <a:ea typeface="Pretendard"/>
                 <a:cs typeface="Pretendard"/>
               </a:rPr>
-              <a:t>spark.version 이 3.5.x · master 가 local[*]</a:t>
+              <a:t>'3.5.3' · 숫자 하나(실측 16) · 'local[*]'</a:t>
             </a:r>
           </a:p>
         </p:txBody>
@@ -4251,7 +4251,7 @@
                 <a:ea typeface="Pretendard"/>
                 <a:cs typeface="Pretendard"/>
               </a:rPr>
-              <a:t>transformation 뒤 Jobs 탭에 Job 이 0 이다</a:t>
+              <a:t>transformation 뒤 Completed Jobs 가 없다</a:t>
             </a:r>
           </a:p>
         </p:txBody>
@@ -4397,7 +4397,7 @@
                 <a:ea typeface="Pretendard"/>
                 <a:cs typeface="Pretendard"/>
               </a:rPr>
-              <a:t>count() 가 500000 · Job 하나 · show(5) 로 하나 더</a:t>
+              <a:t>count() 500000 · Job 2개, show(5) 로 Job 3개 더</a:t>
             </a:r>
           </a:p>
         </p:txBody>
@@ -4543,7 +4543,7 @@
                 <a:ea typeface="Pretendard"/>
                 <a:cs typeface="Pretendard"/>
               </a:rPr>
-              <a:t>explain() 에 Range → Project → Filter 가 보인다</a:t>
+              <a:t>explain() 을 아래에서 위로 — Range → Filter → Project</a:t>
             </a:r>
           </a:p>
         </p:txBody>
@@ -4689,7 +4689,7 @@
                 <a:ea typeface="Pretendard"/>
                 <a:cs typeface="Pretendard"/>
               </a:rPr>
-              <a:t>파티션 수 ≈ 코어 수 · 각 파티션의 행이 고르다</a:t>
+              <a:t>파티션 16 · 0~15 가 62500 씩(코어 수에 따라 다름)</a:t>
             </a:r>
           </a:p>
         </p:txBody>
@@ -4826,7 +4826,7 @@
       <p:grpSpPr/>
       <p:sp>
         <p:nvSpPr>
-          <p:cNvPr id="2" name="Oval 1"/>
+          <p:cNvPr id="2" name="deckgen:decor"/>
           <p:cNvSpPr/>
           <p:nvPr/>
         </p:nvSpPr>
@@ -4856,7 +4856,7 @@
       </p:sp>
       <p:sp>
         <p:nvSpPr>
-          <p:cNvPr id="3" name="Oval 2"/>
+          <p:cNvPr id="3" name="deckgen:decor"/>
           <p:cNvSpPr/>
           <p:nvPr/>
         </p:nvSpPr>
@@ -4991,7 +4991,7 @@
                 <a:ea typeface="Pretendard"/>
                 <a:cs typeface="Pretendard"/>
               </a:rPr>
-              <a:t>다음은 Spark UI 로 잡 구조 읽기 (1H)</a:t>
+              <a:t>다음은 Spark UI로 잡 구조 읽기 (1H)</a:t>
             </a:r>
           </a:p>
         </p:txBody>
@@ -5148,7 +5148,7 @@
                 <a:ea typeface="Pretendard"/>
                 <a:cs typeface="Pretendard"/>
               </a:rPr>
-              <a:t>Jobs 탭 — count() 와 show(5) 두 줄</a:t>
+              <a:t>Jobs 탭 — count · showString 다섯 줄</a:t>
             </a:r>
           </a:p>
         </p:txBody>
@@ -5264,7 +5264,7 @@
                 <a:ea typeface="Pretendard"/>
                 <a:cs typeface="Pretendard"/>
               </a:rPr>
-              <a:t>groupBy 로 Stage 를 2개로 — 셔플</a:t>
+              <a:t>groupBy 셔플로 Stage 가 갈린다</a:t>
             </a:r>
           </a:p>
         </p:txBody>
@@ -5380,7 +5380,7 @@
                 <a:ea typeface="Pretendard"/>
                 <a:cs typeface="Pretendard"/>
               </a:rPr>
-              <a:t>Stages 탭의 Task 수 = 파티션 수</a:t>
+              <a:t>Stages 탭의 Task · DAG · Executors</a:t>
             </a:r>
           </a:p>
         </p:txBody>
@@ -5496,7 +5496,7 @@
                 <a:ea typeface="Pretendard"/>
                 <a:cs typeface="Pretendard"/>
               </a:rPr>
-              <a:t>cache 전후 시간 재기</a:t>
+              <a:t>cache 뒤 Storage 탭 · 셸 하나 더(실패)</a:t>
             </a:r>
           </a:p>
         </p:txBody>
@@ -5633,7 +5633,7 @@
       <p:grpSpPr/>
       <p:sp>
         <p:nvSpPr>
-          <p:cNvPr id="2" name="Oval 1"/>
+          <p:cNvPr id="2" name="deckgen:decor"/>
           <p:cNvSpPr/>
           <p:nvPr/>
         </p:nvSpPr>
@@ -5663,7 +5663,7 @@
       </p:sp>
       <p:sp>
         <p:nvSpPr>
-          <p:cNvPr id="3" name="Oval 2"/>
+          <p:cNvPr id="3" name="deckgen:decor"/>
           <p:cNvSpPr/>
           <p:nvPr/>
         </p:nvSpPr>
@@ -5693,7 +5693,7 @@
       </p:sp>
       <p:sp>
         <p:nvSpPr>
-          <p:cNvPr id="4" name="Oval 3"/>
+          <p:cNvPr id="4" name="deckgen:decor"/>
           <p:cNvSpPr/>
           <p:nvPr/>
         </p:nvSpPr>
@@ -6120,7 +6120,7 @@
                 <a:ea typeface="Pretendard"/>
                 <a:cs typeface="Pretendard"/>
               </a:rPr>
-              <a:t>transformation 만 걸었을 때 Jobs 탭이 비어 있는 것을 본다</a:t>
+              <a:t>transformation 만 걸면 Completed Jobs 가 없음을 본다</a:t>
             </a:r>
           </a:p>
         </p:txBody>
@@ -6266,7 +6266,7 @@
                 <a:ea typeface="Pretendard"/>
                 <a:cs typeface="Pretendard"/>
               </a:rPr>
-              <a:t>count() · show(5) 로 action 하나가 Job 하나임을 확인한다</a:t>
+              <a:t>count() 는 Job 2개, show(5) 는 Job 3개 — 직접 센다</a:t>
             </a:r>
           </a:p>
         </p:txBody>
@@ -6412,7 +6412,7 @@
                 <a:ea typeface="Pretendard"/>
                 <a:cs typeface="Pretendard"/>
               </a:rPr>
-              <a:t>explain() 으로 실행 계획을 읽고 파티션 수를 확인한다</a:t>
+              <a:t>explain() 을 아래에서 위로 읽고 파티션 수를 확인한다</a:t>
             </a:r>
           </a:p>
         </p:txBody>
@@ -6624,7 +6624,7 @@
       <p:grpSpPr/>
       <p:sp>
         <p:nvSpPr>
-          <p:cNvPr id="2" name="Oval 1"/>
+          <p:cNvPr id="2" name="deckgen:decor"/>
           <p:cNvSpPr/>
           <p:nvPr/>
         </p:nvSpPr>
@@ -6654,7 +6654,7 @@
       </p:sp>
       <p:sp>
         <p:nvSpPr>
-          <p:cNvPr id="3" name="Oval 2"/>
+          <p:cNvPr id="3" name="deckgen:decor"/>
           <p:cNvSpPr/>
           <p:nvPr/>
         </p:nvSpPr>
@@ -6684,7 +6684,7 @@
       </p:sp>
       <p:sp>
         <p:nvSpPr>
-          <p:cNvPr id="4" name="Oval 3"/>
+          <p:cNvPr id="4" name="deckgen:decor"/>
           <p:cNvSpPr/>
           <p:nvPr/>
         </p:nvSpPr>
@@ -6860,7 +6860,7 @@
                 <a:ea typeface="Pretendard"/>
                 <a:cs typeface="Pretendard"/>
               </a:rPr>
-              <a:t>~/data-eng/week5 폴더를 만들고 시작합니다 — Spark UI 포트 4040 을 함께 엽니다</a:t>
+              <a:t>python 상자는 &gt;&gt;&gt; 에 붙여 넣고, bash 상자는 새 터미널 창에서 칩니다</a:t>
             </a:r>
           </a:p>
         </p:txBody>
@@ -7499,6 +7499,24 @@
                 <a:cs typeface="Pretendard"/>
               </a:rPr>
               <a:t>explain()</a:t>
+            </a:r>
+          </a:p>
+          <a:p>
+            <a:pPr algn="ctr">
+              <a:lnSpc>
+                <a:spcPct val="146000"/>
+              </a:lnSpc>
+            </a:pPr>
+            <a:r>
+              <a:rPr sz="2100" b="0">
+                <a:solidFill>
+                  <a:srgbClr val="3D3D3D"/>
+                </a:solidFill>
+                <a:latin typeface="Pretendard"/>
+                <a:ea typeface="Pretendard"/>
+                <a:cs typeface="Pretendard"/>
+              </a:rPr>
+              <a:t>일부러 실패</a:t>
             </a:r>
           </a:p>
         </p:txBody>
@@ -7799,7 +7817,7 @@
       <p:grpSpPr/>
       <p:sp>
         <p:nvSpPr>
-          <p:cNvPr id="2" name="Oval 1"/>
+          <p:cNvPr id="2" name="deckgen:decor"/>
           <p:cNvSpPr/>
           <p:nvPr/>
         </p:nvSpPr>
@@ -7829,7 +7847,7 @@
       </p:sp>
       <p:sp>
         <p:nvSpPr>
-          <p:cNvPr id="3" name="Oval 2"/>
+          <p:cNvPr id="3" name="deckgen:decor"/>
           <p:cNvSpPr/>
           <p:nvPr/>
         </p:nvSpPr>
@@ -7859,7 +7877,7 @@
       </p:sp>
       <p:sp>
         <p:nvSpPr>
-          <p:cNvPr id="4" name="Oval 3"/>
+          <p:cNvPr id="4" name="deckgen:decor"/>
           <p:cNvSpPr/>
           <p:nvPr/>
         </p:nvSpPr>
@@ -8755,7 +8773,7 @@
                 <a:ea typeface="Pretendard"/>
                 <a:cs typeface="Pretendard"/>
               </a:rPr>
-              <a:t>확인: 로고 아스키 아트 뒤 &gt;&gt;&gt; 프롬프트 · 버전 3.5.x · master local[*] = 코어 수만큼 나눈다(5-2 에서 spark://… 로) · 이미지 약 1GB 라 첫 실행은 몇 분</a:t>
+              <a:t>확인: 결과 '3.5.3' · 16 · 'local[*]' — 가운데 숫자는 Docker 에 준 CPU 수라 사람마다 다름</a:t>
             </a:r>
           </a:p>
         </p:txBody>
@@ -8892,7 +8910,7 @@
       <p:grpSpPr/>
       <p:sp>
         <p:nvSpPr>
-          <p:cNvPr id="2" name="Oval 1"/>
+          <p:cNvPr id="2" name="deckgen:decor"/>
           <p:cNvSpPr/>
           <p:nvPr/>
         </p:nvSpPr>
@@ -8922,7 +8940,7 @@
       </p:sp>
       <p:sp>
         <p:nvSpPr>
-          <p:cNvPr id="3" name="Oval 2"/>
+          <p:cNvPr id="3" name="deckgen:decor"/>
           <p:cNvSpPr/>
           <p:nvPr/>
         </p:nvSpPr>
@@ -8952,7 +8970,7 @@
       </p:sp>
       <p:sp>
         <p:nvSpPr>
-          <p:cNvPr id="4" name="Oval 3"/>
+          <p:cNvPr id="4" name="deckgen:decor"/>
           <p:cNvSpPr/>
           <p:nvPr/>
         </p:nvSpPr>
@@ -9169,7 +9187,7 @@
                 <a:ea typeface="Pretendard"/>
                 <a:cs typeface="Pretendard"/>
               </a:rPr>
-              <a:t>즉시 반환 · Jobs 탭에 Job 이 하나도 없다</a:t>
+              <a:t>즉시 반환 · 4040 은 열리지만 Completed Jobs 없음</a:t>
             </a:r>
           </a:p>
         </p:txBody>
@@ -9783,7 +9801,7 @@
                 <a:ea typeface="Pretendard"/>
                 <a:cs typeface="Pretendard"/>
               </a:rPr>
-              <a:t>count() 결과 500000 · Jobs 탭에 Job 이 나타난다</a:t>
+              <a:t>action 하나가 Job 여럿을 만들기도 한다</a:t>
             </a:r>
           </a:p>
         </p:txBody>
@@ -9963,7 +9981,7 @@
                 <a:ea typeface="Pretendard"/>
                 <a:cs typeface="Pretendard"/>
               </a:rPr>
-              <a:t>Job 하나</a:t>
+              <a:t>500000</a:t>
             </a:r>
           </a:p>
           <a:p>
@@ -9981,7 +9999,7 @@
                 <a:ea typeface="Pretendard"/>
                 <a:cs typeface="Pretendard"/>
               </a:rPr>
-              <a:t>500000</a:t>
+              <a:t>Job 0 · 1</a:t>
             </a:r>
           </a:p>
         </p:txBody>
@@ -10157,7 +10175,25 @@
                 <a:ea typeface="Pretendard"/>
                 <a:cs typeface="Pretendard"/>
               </a:rPr>
-              <a:t>Job 하나 더</a:t>
+              <a:t>Job 2 · 3 · 4</a:t>
+            </a:r>
+          </a:p>
+          <a:p>
+            <a:pPr algn="ctr">
+              <a:lnSpc>
+                <a:spcPct val="135000"/>
+              </a:lnSpc>
+            </a:pPr>
+            <a:r>
+              <a:rPr sz="1500" b="0">
+                <a:solidFill>
+                  <a:srgbClr val="3D3D3D"/>
+                </a:solidFill>
+                <a:latin typeface="Pretendard"/>
+                <a:ea typeface="Pretendard"/>
+                <a:cs typeface="Pretendard"/>
+              </a:rPr>
+              <a:t>Task 1·4·11</a:t>
             </a:r>
           </a:p>
         </p:txBody>
@@ -10365,7 +10401,7 @@
       <p:grpSpPr/>
       <p:sp>
         <p:nvSpPr>
-          <p:cNvPr id="2" name="Oval 1"/>
+          <p:cNvPr id="2" name="deckgen:decor"/>
           <p:cNvSpPr/>
           <p:nvPr/>
         </p:nvSpPr>
@@ -10395,7 +10431,7 @@
       </p:sp>
       <p:sp>
         <p:nvSpPr>
-          <p:cNvPr id="3" name="Oval 2"/>
+          <p:cNvPr id="3" name="deckgen:decor"/>
           <p:cNvSpPr/>
           <p:nvPr/>
         </p:nvSpPr>
@@ -10425,7 +10461,7 @@
       </p:sp>
       <p:sp>
         <p:nvSpPr>
-          <p:cNvPr id="4" name="Oval 3"/>
+          <p:cNvPr id="4" name="deckgen:decor"/>
           <p:cNvSpPr/>
           <p:nvPr/>
         </p:nvSpPr>
@@ -10530,7 +10566,7 @@
                 <a:ea typeface="Pretendard"/>
                 <a:cs typeface="Pretendard"/>
               </a:rPr>
-              <a:t>explain() 으로 계획서를 읽는다</a:t>
+              <a:t>explain() 은 아래에서 위로 읽는다</a:t>
             </a:r>
           </a:p>
         </p:txBody>
@@ -10574,7 +10610,7 @@
         <p:spPr>
           <a:xfrm>
             <a:off x="1143000" y="2781300"/>
-            <a:ext cx="4442460" cy="590550"/>
+            <a:ext cx="5082540" cy="590550"/>
           </a:xfrm>
           <a:prstGeom prst="rect">
             <a:avLst/>
@@ -10604,7 +10640,7 @@
         <p:spPr>
           <a:xfrm>
             <a:off x="1143000" y="2781300"/>
-            <a:ext cx="4442460" cy="590550"/>
+            <a:ext cx="5082540" cy="590550"/>
           </a:xfrm>
           <a:prstGeom prst="rect">
             <a:avLst/>
@@ -10631,7 +10667,7 @@
                 <a:ea typeface="Pretendard"/>
                 <a:cs typeface="Pretendard"/>
               </a:rPr>
-              <a:t>명령</a:t>
+              <a:t>Physical Plan</a:t>
             </a:r>
           </a:p>
         </p:txBody>
@@ -10644,8 +10680,8 @@
         </p:nvSpPr>
         <p:spPr>
           <a:xfrm>
-            <a:off x="5623560" y="2781300"/>
-            <a:ext cx="5722620" cy="590550"/>
+            <a:off x="6263640" y="2781300"/>
+            <a:ext cx="4762500" cy="590550"/>
           </a:xfrm>
           <a:prstGeom prst="rect">
             <a:avLst/>
@@ -10674,8 +10710,8 @@
         </p:nvSpPr>
         <p:spPr>
           <a:xfrm>
-            <a:off x="5623560" y="2781300"/>
-            <a:ext cx="5722620" cy="590550"/>
+            <a:off x="6263640" y="2781300"/>
+            <a:ext cx="4762500" cy="590550"/>
           </a:xfrm>
           <a:prstGeom prst="rect">
             <a:avLst/>
@@ -10702,7 +10738,7 @@
                 <a:ea typeface="Pretendard"/>
                 <a:cs typeface="Pretendard"/>
               </a:rPr>
-              <a:t>보이는 것</a:t>
+              <a:t>읽는 순서</a:t>
             </a:r>
           </a:p>
         </p:txBody>
@@ -10715,8 +10751,8 @@
         </p:nvSpPr>
         <p:spPr>
           <a:xfrm>
-            <a:off x="11384280" y="2781300"/>
-            <a:ext cx="5760720" cy="590550"/>
+            <a:off x="11064240" y="2781300"/>
+            <a:ext cx="6080760" cy="590550"/>
           </a:xfrm>
           <a:prstGeom prst="rect">
             <a:avLst/>
@@ -10745,8 +10781,8 @@
         </p:nvSpPr>
         <p:spPr>
           <a:xfrm>
-            <a:off x="11384280" y="2781300"/>
-            <a:ext cx="5760720" cy="590550"/>
+            <a:off x="11064240" y="2781300"/>
+            <a:ext cx="6080760" cy="590550"/>
           </a:xfrm>
           <a:prstGeom prst="rect">
             <a:avLst/>
@@ -10787,7 +10823,7 @@
         <p:spPr>
           <a:xfrm>
             <a:off x="1143000" y="3448050"/>
-            <a:ext cx="4442460" cy="647700"/>
+            <a:ext cx="5082540" cy="647700"/>
           </a:xfrm>
           <a:prstGeom prst="roundRect">
             <a:avLst>
@@ -10821,7 +10857,7 @@
         <p:spPr>
           <a:xfrm>
             <a:off x="1238250" y="3448050"/>
-            <a:ext cx="4251960" cy="647700"/>
+            <a:ext cx="4892040" cy="647700"/>
           </a:xfrm>
           <a:prstGeom prst="rect">
             <a:avLst/>
@@ -10848,7 +10884,7 @@
                 <a:ea typeface="Pretendard"/>
                 <a:cs typeface="Pretendard"/>
               </a:rPr>
-              <a:t>filtered.explain()</a:t>
+              <a:t>*(1) Project</a:t>
             </a:r>
           </a:p>
         </p:txBody>
@@ -10861,8 +10897,8 @@
         </p:nvSpPr>
         <p:spPr>
           <a:xfrm>
-            <a:off x="5623560" y="3448050"/>
-            <a:ext cx="5722620" cy="647700"/>
+            <a:off x="6263640" y="3448050"/>
+            <a:ext cx="4762500" cy="647700"/>
           </a:xfrm>
           <a:prstGeom prst="roundRect">
             <a:avLst>
@@ -10895,8 +10931,8 @@
         </p:nvSpPr>
         <p:spPr>
           <a:xfrm>
-            <a:off x="5718810" y="3448050"/>
-            <a:ext cx="5532120" cy="647700"/>
+            <a:off x="6358890" y="3448050"/>
+            <a:ext cx="4572000" cy="647700"/>
           </a:xfrm>
           <a:prstGeom prst="rect">
             <a:avLst/>
@@ -10923,25 +10959,7 @@
                 <a:ea typeface="Pretendard"/>
                 <a:cs typeface="Pretendard"/>
               </a:rPr>
-              <a:t>Range → Project</a:t>
-            </a:r>
-          </a:p>
-          <a:p>
-            <a:pPr algn="ctr">
-              <a:lnSpc>
-                <a:spcPct val="115000"/>
-              </a:lnSpc>
-            </a:pPr>
-            <a:r>
-              <a:rPr sz="1875" b="0">
-                <a:solidFill>
-                  <a:srgbClr val="3D3D3D"/>
-                </a:solidFill>
-                <a:latin typeface="Pretendard"/>
-                <a:ea typeface="Pretendard"/>
-                <a:cs typeface="Pretendard"/>
-              </a:rPr>
-              <a:t>→ Filter</a:t>
+              <a:t>③ 마지막</a:t>
             </a:r>
           </a:p>
         </p:txBody>
@@ -10954,8 +10972,8 @@
         </p:nvSpPr>
         <p:spPr>
           <a:xfrm>
-            <a:off x="11384280" y="3448050"/>
-            <a:ext cx="5760720" cy="647700"/>
+            <a:off x="11064240" y="3448050"/>
+            <a:ext cx="6080760" cy="647700"/>
           </a:xfrm>
           <a:prstGeom prst="roundRect">
             <a:avLst>
@@ -10988,8 +11006,8 @@
         </p:nvSpPr>
         <p:spPr>
           <a:xfrm>
-            <a:off x="11479530" y="3448050"/>
-            <a:ext cx="5570220" cy="647700"/>
+            <a:off x="11159490" y="3448050"/>
+            <a:ext cx="5890260" cy="647700"/>
           </a:xfrm>
           <a:prstGeom prst="rect">
             <a:avLst/>
@@ -11016,25 +11034,7 @@
                 <a:ea typeface="Pretendard"/>
                 <a:cs typeface="Pretendard"/>
               </a:rPr>
-              <a:t>할 일 목록이</a:t>
-            </a:r>
-          </a:p>
-          <a:p>
-            <a:pPr algn="ctr">
-              <a:lnSpc>
-                <a:spcPct val="115000"/>
-              </a:lnSpc>
-            </a:pPr>
-            <a:r>
-              <a:rPr sz="1875" b="0">
-                <a:solidFill>
-                  <a:srgbClr val="3D3D3D"/>
-                </a:solidFill>
-                <a:latin typeface="Pretendard"/>
-                <a:ea typeface="Pretendard"/>
-                <a:cs typeface="Pretendard"/>
-              </a:rPr>
-              <a:t>하나의 계획으로</a:t>
+              <a:t>double 계산</a:t>
             </a:r>
           </a:p>
         </p:txBody>
@@ -11048,7 +11048,7 @@
         <p:spPr>
           <a:xfrm>
             <a:off x="1143000" y="4171950"/>
-            <a:ext cx="4442460" cy="647700"/>
+            <a:ext cx="5082540" cy="647700"/>
           </a:xfrm>
           <a:prstGeom prst="roundRect">
             <a:avLst>
@@ -11082,7 +11082,7 @@
         <p:spPr>
           <a:xfrm>
             <a:off x="1238250" y="4171950"/>
-            <a:ext cx="4251960" cy="647700"/>
+            <a:ext cx="4892040" cy="647700"/>
           </a:xfrm>
           <a:prstGeom prst="rect">
             <a:avLst/>
@@ -11109,7 +11109,7 @@
                 <a:ea typeface="Pretendard"/>
                 <a:cs typeface="Pretendard"/>
               </a:rPr>
-              <a:t>explain(True)</a:t>
+              <a:t>+- *(1) Filter</a:t>
             </a:r>
           </a:p>
         </p:txBody>
@@ -11122,8 +11122,8 @@
         </p:nvSpPr>
         <p:spPr>
           <a:xfrm>
-            <a:off x="5623560" y="4171950"/>
-            <a:ext cx="5722620" cy="647700"/>
+            <a:off x="6263640" y="4171950"/>
+            <a:ext cx="4762500" cy="647700"/>
           </a:xfrm>
           <a:prstGeom prst="roundRect">
             <a:avLst>
@@ -11156,8 +11156,8 @@
         </p:nvSpPr>
         <p:spPr>
           <a:xfrm>
-            <a:off x="5718810" y="4171950"/>
-            <a:ext cx="5532120" cy="647700"/>
+            <a:off x="6358890" y="4171950"/>
+            <a:ext cx="4572000" cy="647700"/>
           </a:xfrm>
           <a:prstGeom prst="rect">
             <a:avLst/>
@@ -11184,25 +11184,7 @@
                 <a:ea typeface="Pretendard"/>
                 <a:cs typeface="Pretendard"/>
               </a:rPr>
-              <a:t>논리 계획부터</a:t>
-            </a:r>
-          </a:p>
-          <a:p>
-            <a:pPr algn="ctr">
-              <a:lnSpc>
-                <a:spcPct val="115000"/>
-              </a:lnSpc>
-            </a:pPr>
-            <a:r>
-              <a:rPr sz="1875" b="0">
-                <a:solidFill>
-                  <a:srgbClr val="3D3D3D"/>
-                </a:solidFill>
-                <a:latin typeface="Pretendard"/>
-                <a:ea typeface="Pretendard"/>
-                <a:cs typeface="Pretendard"/>
-              </a:rPr>
-              <a:t>물리 계획까지</a:t>
+              <a:t>② 두 번째</a:t>
             </a:r>
           </a:p>
         </p:txBody>
@@ -11215,8 +11197,8 @@
         </p:nvSpPr>
         <p:spPr>
           <a:xfrm>
-            <a:off x="11384280" y="4171950"/>
-            <a:ext cx="5760720" cy="647700"/>
+            <a:off x="11064240" y="4171950"/>
+            <a:ext cx="6080760" cy="647700"/>
           </a:xfrm>
           <a:prstGeom prst="roundRect">
             <a:avLst>
@@ -11249,8 +11231,8 @@
         </p:nvSpPr>
         <p:spPr>
           <a:xfrm>
-            <a:off x="11479530" y="4171950"/>
-            <a:ext cx="5570220" cy="647700"/>
+            <a:off x="11159490" y="4171950"/>
+            <a:ext cx="5890260" cy="647700"/>
           </a:xfrm>
           <a:prstGeom prst="rect">
             <a:avLst/>
@@ -11277,7 +11259,7 @@
                 <a:ea typeface="Pretendard"/>
                 <a:cs typeface="Pretendard"/>
               </a:rPr>
-              <a:t>전부 보기</a:t>
+              <a:t>id * 2 &gt; 1000000</a:t>
             </a:r>
           </a:p>
         </p:txBody>
@@ -11291,7 +11273,7 @@
         <p:spPr>
           <a:xfrm>
             <a:off x="1143000" y="4895850"/>
-            <a:ext cx="4442460" cy="647700"/>
+            <a:ext cx="5082540" cy="647700"/>
           </a:xfrm>
           <a:prstGeom prst="roundRect">
             <a:avLst>
@@ -11325,7 +11307,7 @@
         <p:spPr>
           <a:xfrm>
             <a:off x="1238250" y="4895850"/>
-            <a:ext cx="4251960" cy="647700"/>
+            <a:ext cx="4892040" cy="647700"/>
           </a:xfrm>
           <a:prstGeom prst="rect">
             <a:avLst/>
@@ -11352,7 +11334,7 @@
                 <a:ea typeface="Pretendard"/>
                 <a:cs typeface="Pretendard"/>
               </a:rPr>
-              <a:t>q.explain()</a:t>
+              <a:t>+- *(1) Range</a:t>
             </a:r>
           </a:p>
         </p:txBody>
@@ -11365,8 +11347,8 @@
         </p:nvSpPr>
         <p:spPr>
           <a:xfrm>
-            <a:off x="5623560" y="4895850"/>
-            <a:ext cx="5722620" cy="647700"/>
+            <a:off x="6263640" y="4895850"/>
+            <a:ext cx="4762500" cy="647700"/>
           </a:xfrm>
           <a:prstGeom prst="roundRect">
             <a:avLst>
@@ -11399,8 +11381,8 @@
         </p:nvSpPr>
         <p:spPr>
           <a:xfrm>
-            <a:off x="5718810" y="4895850"/>
-            <a:ext cx="5532120" cy="647700"/>
+            <a:off x="6358890" y="4895850"/>
+            <a:ext cx="4572000" cy="647700"/>
           </a:xfrm>
           <a:prstGeom prst="rect">
             <a:avLst/>
@@ -11427,25 +11409,7 @@
                 <a:ea typeface="Pretendard"/>
                 <a:cs typeface="Pretendard"/>
               </a:rPr>
-              <a:t>안 쓰는 컬럼</a:t>
-            </a:r>
-          </a:p>
-          <a:p>
-            <a:pPr algn="ctr">
-              <a:lnSpc>
-                <a:spcPct val="115000"/>
-              </a:lnSpc>
-            </a:pPr>
-            <a:r>
-              <a:rPr sz="1875" b="0">
-                <a:solidFill>
-                  <a:srgbClr val="3D3D3D"/>
-                </a:solidFill>
-                <a:latin typeface="Pretendard"/>
-                <a:ea typeface="Pretendard"/>
-                <a:cs typeface="Pretendard"/>
-              </a:rPr>
-              <a:t>계산이 빠짐</a:t>
+              <a:t>① 처음</a:t>
             </a:r>
           </a:p>
         </p:txBody>
@@ -11458,8 +11422,8 @@
         </p:nvSpPr>
         <p:spPr>
           <a:xfrm>
-            <a:off x="11384280" y="4895850"/>
-            <a:ext cx="5760720" cy="647700"/>
+            <a:off x="11064240" y="4895850"/>
+            <a:ext cx="6080760" cy="647700"/>
           </a:xfrm>
           <a:prstGeom prst="roundRect">
             <a:avLst>
@@ -11492,8 +11456,8 @@
         </p:nvSpPr>
         <p:spPr>
           <a:xfrm>
-            <a:off x="11479530" y="4895850"/>
-            <a:ext cx="5570220" cy="647700"/>
+            <a:off x="11159490" y="4895850"/>
+            <a:ext cx="5890260" cy="647700"/>
           </a:xfrm>
           <a:prstGeom prst="rect">
             <a:avLst/>
@@ -11520,25 +11484,7 @@
                 <a:ea typeface="Pretendard"/>
                 <a:cs typeface="Pretendard"/>
               </a:rPr>
-              <a:t>Catalyst 가</a:t>
-            </a:r>
-          </a:p>
-          <a:p>
-            <a:pPr algn="ctr">
-              <a:lnSpc>
-                <a:spcPct val="115000"/>
-              </a:lnSpc>
-            </a:pPr>
-            <a:r>
-              <a:rPr sz="1875" b="0">
-                <a:solidFill>
-                  <a:srgbClr val="3D3D3D"/>
-                </a:solidFill>
-                <a:latin typeface="Pretendard"/>
-                <a:ea typeface="Pretendard"/>
-                <a:cs typeface="Pretendard"/>
-              </a:rPr>
-              <a:t>계획을 다시 짬</a:t>
+              <a:t>splits=16</a:t>
             </a:r>
           </a:p>
         </p:txBody>
@@ -11552,7 +11498,7 @@
         <p:spPr>
           <a:xfrm>
             <a:off x="1143000" y="5619750"/>
-            <a:ext cx="4442460" cy="647700"/>
+            <a:ext cx="5082540" cy="647700"/>
           </a:xfrm>
           <a:prstGeom prst="roundRect">
             <a:avLst>
@@ -11586,7 +11532,7 @@
         <p:spPr>
           <a:xfrm>
             <a:off x="1238250" y="5619750"/>
-            <a:ext cx="4251960" cy="647700"/>
+            <a:ext cx="4892040" cy="647700"/>
           </a:xfrm>
           <a:prstGeom prst="rect">
             <a:avLst/>
@@ -11613,7 +11559,7 @@
                 <a:ea typeface="Pretendard"/>
                 <a:cs typeface="Pretendard"/>
               </a:rPr>
-              <a:t/>
+              <a:t>explain(True)</a:t>
             </a:r>
           </a:p>
         </p:txBody>
@@ -11626,8 +11572,8 @@
         </p:nvSpPr>
         <p:spPr>
           <a:xfrm>
-            <a:off x="5623560" y="5619750"/>
-            <a:ext cx="5722620" cy="647700"/>
+            <a:off x="6263640" y="5619750"/>
+            <a:ext cx="4762500" cy="647700"/>
           </a:xfrm>
           <a:prstGeom prst="roundRect">
             <a:avLst>
@@ -11660,8 +11606,8 @@
         </p:nvSpPr>
         <p:spPr>
           <a:xfrm>
-            <a:off x="5718810" y="5619750"/>
-            <a:ext cx="5532120" cy="647700"/>
+            <a:off x="6358890" y="5619750"/>
+            <a:ext cx="4572000" cy="647700"/>
           </a:xfrm>
           <a:prstGeom prst="rect">
             <a:avLst/>
@@ -11688,25 +11634,7 @@
                 <a:ea typeface="Pretendard"/>
                 <a:cs typeface="Pretendard"/>
               </a:rPr>
-              <a:t>Filter 가</a:t>
-            </a:r>
-          </a:p>
-          <a:p>
-            <a:pPr algn="ctr">
-              <a:lnSpc>
-                <a:spcPct val="115000"/>
-              </a:lnSpc>
-            </a:pPr>
-            <a:r>
-              <a:rPr sz="1875" b="0">
-                <a:solidFill>
-                  <a:srgbClr val="3D3D3D"/>
-                </a:solidFill>
-                <a:latin typeface="Pretendard"/>
-                <a:ea typeface="Pretendard"/>
-                <a:cs typeface="Pretendard"/>
-              </a:rPr>
-              <a:t>앞으로 당겨짐</a:t>
+              <a:t>Parsed → Optimized</a:t>
             </a:r>
           </a:p>
         </p:txBody>
@@ -11719,8 +11647,8 @@
         </p:nvSpPr>
         <p:spPr>
           <a:xfrm>
-            <a:off x="11384280" y="5619750"/>
-            <a:ext cx="5760720" cy="647700"/>
+            <a:off x="11064240" y="5619750"/>
+            <a:ext cx="6080760" cy="647700"/>
           </a:xfrm>
           <a:prstGeom prst="roundRect">
             <a:avLst>
@@ -11753,8 +11681,8 @@
         </p:nvSpPr>
         <p:spPr>
           <a:xfrm>
-            <a:off x="11479530" y="5619750"/>
-            <a:ext cx="5570220" cy="647700"/>
+            <a:off x="11159490" y="5619750"/>
+            <a:ext cx="5890260" cy="647700"/>
           </a:xfrm>
           <a:prstGeom prst="rect">
             <a:avLst/>
@@ -11781,7 +11709,7 @@
                 <a:ea typeface="Pretendard"/>
                 <a:cs typeface="Pretendard"/>
               </a:rPr>
-              <a:t>「쓴 대로 실행되지</a:t>
+              <a:t>Filter 가 Project</a:t>
             </a:r>
           </a:p>
           <a:p>
@@ -11799,7 +11727,7 @@
                 <a:ea typeface="Pretendard"/>
                 <a:cs typeface="Pretendard"/>
               </a:rPr>
-              <a:t>않는다」</a:t>
+              <a:t>아래로 내려감</a:t>
             </a:r>
           </a:p>
         </p:txBody>
@@ -11840,7 +11768,7 @@
                 <a:ea typeface="Pretendard"/>
                 <a:cs typeface="Pretendard"/>
               </a:rPr>
-              <a:t>q = range → withColumn(x, 쓰지 않을 컬럼) → select("id") → filter("id &gt; 999990") — 결국 id 만 쓰는 쿼리</a:t>
+              <a:t>코드는 withColumn 을 먼저 썼지만 계획은 조건(id * 2 &gt; 1000000)을 계산 앞으로 당겼다 — 걸러진 행은 double 을 계산할 필요가 없다</a:t>
             </a:r>
           </a:p>
         </p:txBody>
@@ -11977,7 +11905,7 @@
       <p:grpSpPr/>
       <p:sp>
         <p:nvSpPr>
-          <p:cNvPr id="2" name="Oval 1"/>
+          <p:cNvPr id="2" name="deckgen:decor"/>
           <p:cNvSpPr/>
           <p:nvPr/>
         </p:nvSpPr>
@@ -12007,7 +11935,7 @@
       </p:sp>
       <p:sp>
         <p:nvSpPr>
-          <p:cNvPr id="3" name="Oval 2"/>
+          <p:cNvPr id="3" name="deckgen:decor"/>
           <p:cNvSpPr/>
           <p:nvPr/>
         </p:nvSpPr>
@@ -12037,7 +11965,7 @@
       </p:sp>
       <p:sp>
         <p:nvSpPr>
-          <p:cNvPr id="4" name="Oval 3"/>
+          <p:cNvPr id="4" name="deckgen:decor"/>
           <p:cNvSpPr/>
           <p:nvPr/>
         </p:nvSpPr>
@@ -12101,7 +12029,7 @@
                 <a:ea typeface="Pretendard"/>
                 <a:cs typeface="Pretendard"/>
               </a:rPr>
-              <a:t>일부러 실패시키기</a:t>
+              <a:t>5단계 — 일부러 실패시키기</a:t>
             </a:r>
           </a:p>
         </p:txBody>
@@ -12142,7 +12070,7 @@
                 <a:ea typeface="Pretendard"/>
                 <a:cs typeface="Pretendard"/>
               </a:rPr>
-              <a:t>action 없이 결과를 기다려 본다</a:t>
+              <a:t>다른 DataFrame 의 컬럼을 끌어다 쓴다</a:t>
             </a:r>
           </a:p>
         </p:txBody>
@@ -12213,7 +12141,7 @@
                 <a:ea typeface="Pretendard"/>
                 <a:cs typeface="Pretendard"/>
               </a:rPr>
-              <a:t>「안 되는 것 같다」를 직접 겪어 봅니다 — 오류가 아니라 지연 평가입니다</a:t>
+              <a:t>쓰지 않을 컬럼 x 를 만들려다 흔히 하는 실수 — action 전에 바로 막힙니다</a:t>
             </a:r>
           </a:p>
         </p:txBody>
@@ -12318,7 +12246,7 @@
                 <a:ea typeface="Pretendard"/>
                 <a:cs typeface="Pretendard"/>
               </a:rPr>
-              <a:t>transformation 5개</a:t>
+              <a:t>잘못 쓴 줄</a:t>
             </a:r>
           </a:p>
         </p:txBody>
@@ -12359,7 +12287,7 @@
                 <a:ea typeface="Pretendard"/>
                 <a:cs typeface="Pretendard"/>
               </a:rPr>
-              <a:t>withColumn·filter</a:t>
+              <a:t>spark.range(1).id</a:t>
             </a:r>
           </a:p>
           <a:p>
@@ -12377,7 +12305,7 @@
                 <a:ea typeface="Pretendard"/>
                 <a:cs typeface="Pretendard"/>
               </a:rPr>
-              <a:t>이어 붙이기</a:t>
+              <a:t>* 0 + 1</a:t>
             </a:r>
           </a:p>
         </p:txBody>
@@ -12482,7 +12410,7 @@
                 <a:ea typeface="Pretendard"/>
                 <a:cs typeface="Pretendard"/>
               </a:rPr>
-              <a:t>결과를 기다린다</a:t>
+              <a:t>withColumn 에서</a:t>
             </a:r>
           </a:p>
         </p:txBody>
@@ -12523,7 +12451,7 @@
                 <a:ea typeface="Pretendard"/>
                 <a:cs typeface="Pretendard"/>
               </a:rPr>
-              <a:t>아무것도</a:t>
+              <a:t>Traceback</a:t>
             </a:r>
           </a:p>
           <a:p>
@@ -12541,7 +12469,7 @@
                 <a:ea typeface="Pretendard"/>
                 <a:cs typeface="Pretendard"/>
               </a:rPr>
-              <a:t>안 나온다</a:t>
+              <a:t>explain 전</a:t>
             </a:r>
           </a:p>
         </p:txBody>
@@ -12646,7 +12574,7 @@
                 <a:ea typeface="Pretendard"/>
                 <a:cs typeface="Pretendard"/>
               </a:rPr>
-              <a:t>UI 확인</a:t>
+              <a:t>분석 단계 오류</a:t>
             </a:r>
           </a:p>
         </p:txBody>
@@ -12687,7 +12615,7 @@
                 <a:ea typeface="Pretendard"/>
                 <a:cs typeface="Pretendard"/>
               </a:rPr>
-              <a:t>Jobs 탭</a:t>
+              <a:t>AnalysisException</a:t>
             </a:r>
           </a:p>
           <a:p>
@@ -12705,7 +12633,7 @@
                 <a:ea typeface="Pretendard"/>
                 <a:cs typeface="Pretendard"/>
               </a:rPr>
-              <a:t>여전히 0</a:t>
+              <a:t>id 를 못 찾음</a:t>
             </a:r>
           </a:p>
         </p:txBody>
@@ -12810,7 +12738,7 @@
                 <a:ea typeface="Pretendard"/>
                 <a:cs typeface="Pretendard"/>
               </a:rPr>
-              <a:t>action 을 붙인다</a:t>
+              <a:t>F.lit(1) 로</a:t>
             </a:r>
           </a:p>
         </p:txBody>
@@ -12851,7 +12779,7 @@
                 <a:ea typeface="Pretendard"/>
                 <a:cs typeface="Pretendard"/>
               </a:rPr>
-              <a:t>show() 또는</a:t>
+              <a:t>상수 컬럼은</a:t>
             </a:r>
           </a:p>
           <a:p>
@@ -12869,7 +12797,7 @@
                 <a:ea typeface="Pretendard"/>
                 <a:cs typeface="Pretendard"/>
               </a:rPr>
-              <a:t>count()</a:t>
+              <a:t>lit 으로</a:t>
             </a:r>
           </a:p>
         </p:txBody>
@@ -12974,7 +12902,7 @@
                 <a:ea typeface="Pretendard"/>
                 <a:cs typeface="Pretendard"/>
               </a:rPr>
-              <a:t>Job 이 생긴다</a:t>
+              <a:t>q.explain()</a:t>
             </a:r>
           </a:p>
         </p:txBody>
@@ -13015,7 +12943,7 @@
                 <a:ea typeface="Pretendard"/>
                 <a:cs typeface="Pretendard"/>
               </a:rPr>
-              <a:t>그제야</a:t>
+              <a:t>Filter · Range</a:t>
             </a:r>
           </a:p>
           <a:p>
@@ -13033,7 +12961,7 @@
                 <a:ea typeface="Pretendard"/>
                 <a:cs typeface="Pretendard"/>
               </a:rPr>
-              <a:t>실행</a:t>
+              <a:t>두 줄뿐</a:t>
             </a:r>
           </a:p>
         </p:txBody>
@@ -13170,7 +13098,7 @@
       <p:grpSpPr/>
       <p:sp>
         <p:nvSpPr>
-          <p:cNvPr id="2" name="Oval 1"/>
+          <p:cNvPr id="2" name="deckgen:decor"/>
           <p:cNvSpPr/>
           <p:nvPr/>
         </p:nvSpPr>
@@ -13200,7 +13128,7 @@
       </p:sp>
       <p:sp>
         <p:nvSpPr>
-          <p:cNvPr id="3" name="Oval 2"/>
+          <p:cNvPr id="3" name="deckgen:decor"/>
           <p:cNvSpPr/>
           <p:nvPr/>
         </p:nvSpPr>
@@ -13230,7 +13158,7 @@
       </p:sp>
       <p:sp>
         <p:nvSpPr>
-          <p:cNvPr id="4" name="Oval 3"/>
+          <p:cNvPr id="4" name="deckgen:decor"/>
           <p:cNvSpPr/>
           <p:nvPr/>
         </p:nvSpPr>
@@ -13982,7 +13910,7 @@
                 <a:ea typeface="Pretendard"/>
                 <a:cs typeface="Pretendard"/>
               </a:rPr>
-              <a:t>확인: 파티션 수 ≈ CPU 코어 수 · 각 파티션에 행이 고르게 분포 · 이 숫자가 곧 Task 수 — 다음 1H 에서 UI 로 확인</a:t>
+              <a:t>확인: 두 숫자가 defaultParallelism 과 같고(실측 16 · 16) 파티션 0~15 가 62500 씩 고르게(100만 ÷ 16) — 다음 1H 에서 UI 로 확인</a:t>
             </a:r>
           </a:p>
         </p:txBody>
@@ -14119,7 +14047,7 @@
       <p:grpSpPr/>
       <p:sp>
         <p:nvSpPr>
-          <p:cNvPr id="2" name="Oval 1"/>
+          <p:cNvPr id="2" name="deckgen:decor"/>
           <p:cNvSpPr/>
           <p:nvPr/>
         </p:nvSpPr>
@@ -14149,7 +14077,7 @@
       </p:sp>
       <p:sp>
         <p:nvSpPr>
-          <p:cNvPr id="3" name="Oval 2"/>
+          <p:cNvPr id="3" name="deckgen:decor"/>
           <p:cNvSpPr/>
           <p:nvPr/>
         </p:nvSpPr>
@@ -14179,7 +14107,7 @@
       </p:sp>
       <p:sp>
         <p:nvSpPr>
-          <p:cNvPr id="4" name="Oval 3"/>
+          <p:cNvPr id="4" name="deckgen:decor"/>
           <p:cNvSpPr/>
           <p:nvPr/>
         </p:nvSpPr>
@@ -14905,7 +14833,7 @@
                 <a:ea typeface="Pretendard"/>
                 <a:cs typeface="Pretendard"/>
               </a:rPr>
-              <a:t>UI 의 Job 이 여전히 0 인지 — 앞 장에서 겪은 그것</a:t>
+              <a:t>UI 를 새로고침해 새 Job 이 생기지 않는지 본다</a:t>
             </a:r>
           </a:p>
         </p:txBody>
@@ -14976,7 +14904,7 @@
                 <a:ea typeface="Pretendard"/>
                 <a:cs typeface="Pretendard"/>
               </a:rPr>
-              <a:t>count() 와 show(5) 가 각각 Job 을 만든다 = action 마다 처음부터 다시 계산 — 여러 번 쓸 결과는 cache() (심화 과제)</a:t>
+              <a:t>count() 와 show(5) 가 따로 Job 을 만든다 = action 마다 처음부터 다시 계산 — cache() 는 다음 블록 6단계에서 재 봅니다</a:t>
             </a:r>
           </a:p>
         </p:txBody>
